--- a/submission/Surat-Traffic-Intelligence-PS08.pptx
+++ b/submission/Surat-Traffic-Intelligence-PS08.pptx
@@ -5452,7 +5452,7 @@
                 </a:solidFill>
                 <a:latin typeface="Segoe UI"/>
               </a:rPr>
-              <a:t>The operational system — Webster's</a:t>
+              <a:t>An over-capacity approach brought back under capacity</a:t>
             </a:r>
           </a:p>
         </p:txBody>
@@ -5491,7 +5491,7 @@
                 </a:solidFill>
                 <a:latin typeface="Segoe UI"/>
               </a:rPr>
-              <a:t>Baseline is an untuned fixed timer with equal green splits.</a:t>
+              <a:t>Webster's, on the Surat network. Baseline is an untuned fixed timer with equal green splits.</a:t>
             </a:r>
           </a:p>
         </p:txBody>
@@ -8241,7 +8241,7 @@
                 </a:solidFill>
                 <a:latin typeface="Segoe UI"/>
               </a:rPr>
-              <a:t>Max-pressure, validated on real signals</a:t>
+              <a:t>Real signals spend 41–66% of green on a cleared queue</a:t>
             </a:r>
           </a:p>
         </p:txBody>
@@ -8280,7 +8280,7 @@
                 </a:solidFill>
                 <a:latin typeface="Segoe UI"/>
               </a:rPr>
-              <a:t>Replaying max-pressure against what each real fixed-time signal actually did.</a:t>
+              <a:t>Max-pressure replayed against what each real fixed-time signal actually did.</a:t>
             </a:r>
           </a:p>
         </p:txBody>
@@ -10347,7 +10347,7 @@
                 </a:solidFill>
                 <a:latin typeface="Segoe UI"/>
               </a:rPr>
-              <a:t>Four things this system does that a standard pipeline does not</a:t>
+              <a:t>Four things a standard pipeline would have got wrong</a:t>
             </a:r>
           </a:p>
         </p:txBody>
@@ -12636,20 +12636,59 @@
                 </a:solidFill>
                 <a:latin typeface="Segoe UI"/>
               </a:rPr>
-              <a:t>What one measurement, and what more data, would unlock</a:t>
-            </a:r>
-          </a:p>
-        </p:txBody>
-      </p:sp>
-      <p:sp>
-        <p:nvSpPr>
-          <p:cNvPr id="4" name="Rectangle 3"/>
+              <a:t>One surveyed road width unlocks most of what is missing</a:t>
+            </a:r>
+          </a:p>
+        </p:txBody>
+      </p:sp>
+      <p:sp>
+        <p:nvSpPr>
+          <p:cNvPr id="4" name="TextBox 3"/>
+          <p:cNvSpPr txBox="1"/>
+          <p:nvPr/>
+        </p:nvSpPr>
+        <p:spPr>
+          <a:xfrm>
+            <a:off x="658368" y="1298448"/>
+            <a:ext cx="10874959" cy="365760"/>
+          </a:xfrm>
+          <a:prstGeom prst="rect">
+            <a:avLst/>
+          </a:prstGeom>
+          <a:noFill/>
+        </p:spPr>
+        <p:txBody>
+          <a:bodyPr wrap="square" lIns="0" rIns="0" tIns="0" bIns="0" anchor="t">
+            <a:spAutoFit/>
+          </a:bodyPr>
+          <a:lstStyle/>
+          <a:p>
+            <a:pPr algn="l">
+              <a:spcAft>
+                <a:spcPts val="0"/>
+              </a:spcAft>
+            </a:pPr>
+            <a:r>
+              <a:rPr sz="1350" b="0" i="0">
+                <a:solidFill>
+                  <a:srgbClr val="52514E"/>
+                </a:solidFill>
+                <a:latin typeface="Segoe UI"/>
+              </a:rPr>
+              <a:t>Everything below the first line needs no new hardware at all.</a:t>
+            </a:r>
+          </a:p>
+        </p:txBody>
+      </p:sp>
+      <p:sp>
+        <p:nvSpPr>
+          <p:cNvPr id="5" name="Rectangle 4"/>
           <p:cNvSpPr/>
           <p:nvPr/>
         </p:nvSpPr>
         <p:spPr>
           <a:xfrm>
-            <a:off x="658368" y="1298448"/>
+            <a:off x="658368" y="1664208"/>
             <a:ext cx="10874959" cy="13970"/>
           </a:xfrm>
           <a:prstGeom prst="rect">
@@ -12687,13 +12726,13 @@
       </p:sp>
       <p:sp>
         <p:nvSpPr>
-          <p:cNvPr id="5" name="TextBox 4"/>
-          <p:cNvSpPr txBox="1"/>
-          <p:nvPr/>
-        </p:nvSpPr>
-        <p:spPr>
-          <a:xfrm>
-            <a:off x="658368" y="1572768"/>
+          <p:cNvPr id="6" name="TextBox 5"/>
+          <p:cNvSpPr txBox="1"/>
+          <p:nvPr/>
+        </p:nvSpPr>
+        <p:spPr>
+          <a:xfrm>
+            <a:off x="658368" y="1938528"/>
             <a:ext cx="5577840" cy="274320"/>
           </a:xfrm>
           <a:prstGeom prst="rect">
@@ -12726,13 +12765,13 @@
       </p:sp>
       <p:sp>
         <p:nvSpPr>
-          <p:cNvPr id="6" name="TextBox 5"/>
-          <p:cNvSpPr txBox="1"/>
-          <p:nvPr/>
-        </p:nvSpPr>
-        <p:spPr>
-          <a:xfrm>
-            <a:off x="658368" y="1865376"/>
+          <p:cNvPr id="7" name="TextBox 6"/>
+          <p:cNvSpPr txBox="1"/>
+          <p:nvPr/>
+        </p:nvSpPr>
+        <p:spPr>
+          <a:xfrm>
+            <a:off x="658368" y="2231136"/>
             <a:ext cx="5577840" cy="365760"/>
           </a:xfrm>
           <a:prstGeom prst="rect">
@@ -12851,13 +12890,13 @@
       </p:sp>
       <p:sp>
         <p:nvSpPr>
-          <p:cNvPr id="7" name="TextBox 6"/>
-          <p:cNvSpPr txBox="1"/>
-          <p:nvPr/>
-        </p:nvSpPr>
-        <p:spPr>
-          <a:xfrm>
-            <a:off x="6693408" y="1572768"/>
+          <p:cNvPr id="8" name="TextBox 7"/>
+          <p:cNvSpPr txBox="1"/>
+          <p:nvPr/>
+        </p:nvSpPr>
+        <p:spPr>
+          <a:xfrm>
+            <a:off x="6693408" y="1938528"/>
             <a:ext cx="5029200" cy="274320"/>
           </a:xfrm>
           <a:prstGeom prst="rect">
@@ -12890,13 +12929,13 @@
       </p:sp>
       <p:sp>
         <p:nvSpPr>
-          <p:cNvPr id="8" name="TextBox 7"/>
-          <p:cNvSpPr txBox="1"/>
-          <p:nvPr/>
-        </p:nvSpPr>
-        <p:spPr>
-          <a:xfrm>
-            <a:off x="6693408" y="1865376"/>
+          <p:cNvPr id="9" name="TextBox 8"/>
+          <p:cNvSpPr txBox="1"/>
+          <p:nvPr/>
+        </p:nvSpPr>
+        <p:spPr>
+          <a:xfrm>
+            <a:off x="6693408" y="2231136"/>
             <a:ext cx="5029200" cy="365760"/>
           </a:xfrm>
           <a:prstGeom prst="rect">
@@ -13015,7 +13054,7 @@
       </p:sp>
       <p:sp>
         <p:nvSpPr>
-          <p:cNvPr id="9" name="TextBox 8"/>
+          <p:cNvPr id="10" name="TextBox 9"/>
           <p:cNvSpPr txBox="1"/>
           <p:nvPr/>
         </p:nvSpPr>
@@ -13054,7 +13093,7 @@
       </p:sp>
       <p:sp>
         <p:nvSpPr>
-          <p:cNvPr id="10" name="Rectangle 9"/>
+          <p:cNvPr id="11" name="Rectangle 10"/>
           <p:cNvSpPr/>
           <p:nvPr/>
         </p:nvSpPr>
@@ -13098,7 +13137,7 @@
       </p:sp>
       <p:sp>
         <p:nvSpPr>
-          <p:cNvPr id="11" name="TextBox 10"/>
+          <p:cNvPr id="12" name="TextBox 11"/>
           <p:cNvSpPr txBox="1"/>
           <p:nvPr/>
         </p:nvSpPr>
@@ -13221,7 +13260,7 @@
       </p:sp>
       <p:sp>
         <p:nvSpPr>
-          <p:cNvPr id="12" name="TextBox 11"/>
+          <p:cNvPr id="13" name="TextBox 12"/>
           <p:cNvSpPr txBox="1"/>
           <p:nvPr/>
         </p:nvSpPr>
@@ -13269,7 +13308,7 @@
       </p:sp>
       <p:sp>
         <p:nvSpPr>
-          <p:cNvPr id="13" name="TextBox 12"/>
+          <p:cNvPr id="14" name="TextBox 13"/>
           <p:cNvSpPr txBox="1"/>
           <p:nvPr/>
         </p:nvSpPr>
@@ -13405,7 +13444,7 @@
                 </a:solidFill>
                 <a:latin typeface="Segoe UI"/>
               </a:rPr>
-              <a:t>PS-08 — what is being asked</a:t>
+              <a:t>Measure, optimise and predict — on cameras the city already owns</a:t>
             </a:r>
           </a:p>
         </p:txBody>
@@ -13444,7 +13483,7 @@
                 </a:solidFill>
                 <a:latin typeface="Segoe UI"/>
               </a:rPr>
-              <a:t>Use the city's existing CCTV network to measure, optimise and predict — without new hardware.</a:t>
+              <a:t>No new hardware. Seven existing CCTV feeds, and four things to do with them.</a:t>
             </a:r>
           </a:p>
         </p:txBody>
@@ -14777,7 +14816,7 @@
                 </a:solidFill>
                 <a:latin typeface="Segoe UI"/>
               </a:rPr>
-              <a:t>What this data can — and cannot — support</a:t>
+              <a:t>Seven cameras — but only two can answer the question asked</a:t>
             </a:r>
           </a:p>
         </p:txBody>
@@ -16951,7 +16990,7 @@
                 </a:solidFill>
                 <a:latin typeface="Segoe UI"/>
               </a:rPr>
-              <a:t>In the worst gridlock, detection counts fewer vehicles</a:t>
+              <a:t>The worst gridlock produces the fewest detections</a:t>
             </a:r>
           </a:p>
         </p:txBody>
@@ -19863,20 +19902,59 @@
                 </a:solidFill>
                 <a:latin typeface="Segoe UI"/>
               </a:rPr>
-              <a:t>One dashboard, two tracks, thirteen views</a:t>
-            </a:r>
-          </a:p>
-        </p:txBody>
-      </p:sp>
-      <p:sp>
-        <p:nvSpPr>
-          <p:cNvPr id="4" name="Rectangle 3"/>
+              <a:t>Thirteen views across two tracks that never mix</a:t>
+            </a:r>
+          </a:p>
+        </p:txBody>
+      </p:sp>
+      <p:sp>
+        <p:nvSpPr>
+          <p:cNvPr id="4" name="TextBox 3"/>
+          <p:cNvSpPr txBox="1"/>
+          <p:nvPr/>
+        </p:nvSpPr>
+        <p:spPr>
+          <a:xfrm>
+            <a:off x="658368" y="1298448"/>
+            <a:ext cx="10874959" cy="365760"/>
+          </a:xfrm>
+          <a:prstGeom prst="rect">
+            <a:avLst/>
+          </a:prstGeom>
+          <a:noFill/>
+        </p:spPr>
+        <p:txBody>
+          <a:bodyPr wrap="square" lIns="0" rIns="0" tIns="0" bIns="0" anchor="t">
+            <a:spAutoFit/>
+          </a:bodyPr>
+          <a:lstStyle/>
+          <a:p>
+            <a:pPr algn="l">
+              <a:spcAft>
+                <a:spcPts val="0"/>
+              </a:spcAft>
+            </a:pPr>
+            <a:r>
+              <a:rPr sz="1350" b="0" i="0">
+                <a:solidFill>
+                  <a:srgbClr val="52514E"/>
+                </a:solidFill>
+                <a:latin typeface="Segoe UI"/>
+              </a:rPr>
+              <a:t>Selecting a control strategy changes which views exist — neither track can render the other's data.</a:t>
+            </a:r>
+          </a:p>
+        </p:txBody>
+      </p:sp>
+      <p:sp>
+        <p:nvSpPr>
+          <p:cNvPr id="5" name="Rectangle 4"/>
           <p:cNvSpPr/>
           <p:nvPr/>
         </p:nvSpPr>
         <p:spPr>
           <a:xfrm>
-            <a:off x="658368" y="1298448"/>
+            <a:off x="658368" y="1664208"/>
             <a:ext cx="10874959" cy="13970"/>
           </a:xfrm>
           <a:prstGeom prst="rect">
@@ -19914,7 +19992,7 @@
       </p:sp>
       <p:pic>
         <p:nvPicPr>
-          <p:cNvPr id="5" name="Picture 4" descr="webster-network.png"/>
+          <p:cNvPr id="6" name="Picture 5" descr="webster-network.png"/>
           <p:cNvPicPr>
             <a:picLocks noChangeAspect="1"/>
           </p:cNvPicPr>
@@ -19928,8 +20006,8 @@
         </p:blipFill>
         <p:spPr>
           <a:xfrm>
-            <a:off x="658368" y="1572768"/>
-            <a:ext cx="6537960" cy="4475389"/>
+            <a:off x="658368" y="1938528"/>
+            <a:ext cx="6172200" cy="4225018"/>
           </a:xfrm>
           <a:prstGeom prst="rect">
             <a:avLst/>
@@ -19938,14 +20016,14 @@
       </p:pic>
       <p:sp>
         <p:nvSpPr>
-          <p:cNvPr id="6" name="Rectangle 5"/>
+          <p:cNvPr id="7" name="Rectangle 6"/>
           <p:cNvSpPr/>
           <p:nvPr/>
         </p:nvSpPr>
         <p:spPr>
           <a:xfrm>
-            <a:off x="658368" y="1572768"/>
-            <a:ext cx="6537960" cy="4475389"/>
+            <a:off x="658368" y="1938528"/>
+            <a:ext cx="6172200" cy="4225018"/>
           </a:xfrm>
           <a:prstGeom prst="rect">
             <a:avLst/>
@@ -19982,13 +20060,13 @@
       </p:sp>
       <p:sp>
         <p:nvSpPr>
-          <p:cNvPr id="7" name="TextBox 6"/>
-          <p:cNvSpPr txBox="1"/>
-          <p:nvPr/>
-        </p:nvSpPr>
-        <p:spPr>
-          <a:xfrm>
-            <a:off x="7516368" y="1572768"/>
+          <p:cNvPr id="8" name="TextBox 7"/>
+          <p:cNvSpPr txBox="1"/>
+          <p:nvPr/>
+        </p:nvSpPr>
+        <p:spPr>
+          <a:xfrm>
+            <a:off x="7516368" y="1938528"/>
             <a:ext cx="4206240" cy="274320"/>
           </a:xfrm>
           <a:prstGeom prst="rect">
@@ -20021,13 +20099,13 @@
       </p:sp>
       <p:sp>
         <p:nvSpPr>
-          <p:cNvPr id="8" name="TextBox 7"/>
-          <p:cNvSpPr txBox="1"/>
-          <p:nvPr/>
-        </p:nvSpPr>
-        <p:spPr>
-          <a:xfrm>
-            <a:off x="7516368" y="1847088"/>
+          <p:cNvPr id="9" name="TextBox 8"/>
+          <p:cNvSpPr txBox="1"/>
+          <p:nvPr/>
+        </p:nvSpPr>
+        <p:spPr>
+          <a:xfrm>
+            <a:off x="7516368" y="2212848"/>
             <a:ext cx="4206240" cy="365760"/>
           </a:xfrm>
           <a:prstGeom prst="rect">
@@ -20194,13 +20272,13 @@
       </p:sp>
       <p:sp>
         <p:nvSpPr>
-          <p:cNvPr id="9" name="TextBox 8"/>
-          <p:cNvSpPr txBox="1"/>
-          <p:nvPr/>
-        </p:nvSpPr>
-        <p:spPr>
-          <a:xfrm>
-            <a:off x="7516368" y="3995928"/>
+          <p:cNvPr id="10" name="TextBox 9"/>
+          <p:cNvSpPr txBox="1"/>
+          <p:nvPr/>
+        </p:nvSpPr>
+        <p:spPr>
+          <a:xfrm>
+            <a:off x="7516368" y="4361688"/>
             <a:ext cx="4206240" cy="274320"/>
           </a:xfrm>
           <a:prstGeom prst="rect">
@@ -20233,13 +20311,13 @@
       </p:sp>
       <p:sp>
         <p:nvSpPr>
-          <p:cNvPr id="10" name="TextBox 9"/>
-          <p:cNvSpPr txBox="1"/>
-          <p:nvPr/>
-        </p:nvSpPr>
-        <p:spPr>
-          <a:xfrm>
-            <a:off x="7516368" y="4270248"/>
+          <p:cNvPr id="11" name="TextBox 10"/>
+          <p:cNvSpPr txBox="1"/>
+          <p:nvPr/>
+        </p:nvSpPr>
+        <p:spPr>
+          <a:xfrm>
+            <a:off x="7516368" y="4636008"/>
             <a:ext cx="4206240" cy="365760"/>
           </a:xfrm>
           <a:prstGeom prst="rect">
@@ -20381,7 +20459,7 @@
       </p:sp>
       <p:sp>
         <p:nvSpPr>
-          <p:cNvPr id="11" name="TextBox 10"/>
+          <p:cNvPr id="12" name="TextBox 11"/>
           <p:cNvSpPr txBox="1"/>
           <p:nvPr/>
         </p:nvSpPr>
@@ -20429,7 +20507,7 @@
       </p:sp>
       <p:sp>
         <p:nvSpPr>
-          <p:cNvPr id="12" name="TextBox 11"/>
+          <p:cNvPr id="13" name="TextBox 12"/>
           <p:cNvSpPr txBox="1"/>
           <p:nvPr/>
         </p:nvSpPr>
@@ -20565,7 +20643,7 @@
                 </a:solidFill>
                 <a:latin typeface="Segoe UI"/>
               </a:rPr>
-              <a:t>Chosen for what the data needs</a:t>
+              <a:t>Each layer answers a constraint in the data</a:t>
             </a:r>
           </a:p>
         </p:txBody>
@@ -24111,7 +24189,7 @@
                 </a:solidFill>
                 <a:latin typeface="Segoe UI"/>
               </a:rPr>
-              <a:t>End to end, in five steps</a:t>
+              <a:t>Five steps from raw video to a signal plan</a:t>
             </a:r>
           </a:p>
         </p:txBody>
@@ -24150,7 +24228,7 @@
                 </a:solidFill>
                 <a:latin typeface="Segoe UI"/>
               </a:rPr>
-              <a:t>One command runs the dashboard; the full pipeline is five steps from raw video.</a:t>
+              <a:t>One command runs the dashboard; the full pipeline is the five steps below.</a:t>
             </a:r>
           </a:p>
         </p:txBody>

--- a/submission/Surat-Traffic-Intelligence-PS08.pptx
+++ b/submission/Surat-Traffic-Intelligence-PS08.pptx
@@ -3956,7 +3956,7 @@
                 </a:solidFill>
                 <a:latin typeface="Segoe UI"/>
               </a:rPr>
-              <a:t>[TEAM NAME]
+              <a:t>Alpha Devs
 </a:t>
             </a:r>
             <a:r>
@@ -3966,7 +3966,7 @@
                 </a:solidFill>
                 <a:latin typeface="Segoe UI"/>
               </a:rPr>
-              <a:t>[Member 1]  ·  [Member 2]  ·  [Member 3]  ·  [Member 4]</a:t>
+              <a:t>Rudraksh Fanse  ·  Rushang Bagada  ·  Ayushman Singh  ·  Nikhil Pathak</a:t>
             </a:r>
           </a:p>
         </p:txBody>

--- a/submission/Surat-Traffic-Intelligence-PS08.pptx
+++ b/submission/Surat-Traffic-Intelligence-PS08.pptx
@@ -7959,7 +7959,7 @@
                 </a:solidFill>
                 <a:latin typeface="Segoe UI"/>
               </a:rPr>
-              <a:t>TWO INDEPENDENT CHECKS</a:t>
+              <a:t>TWO INDEPENDENT CHECKS, AND THE LIMIT</a:t>
             </a:r>
           </a:p>
         </p:txBody>
@@ -8051,6 +8051,40 @@
                 <a:latin typeface="Segoe UI"/>
               </a:rPr>
               <a:t>The optimal plan equalises degree of saturation across approaches (0.929 / 0.929) — the known optimality condition.</a:t>
+            </a:r>
+          </a:p>
+          <a:p>
+            <a:pPr>
+              <a:spcAft>
+                <a:spcPts val="900"/>
+              </a:spcAft>
+            </a:pPr>
+            <a:r>
+              <a:rPr sz="1150" b="1" i="0">
+                <a:solidFill>
+                  <a:srgbClr val="2A78D6"/>
+                </a:solidFill>
+                <a:latin typeface="Segoe UI"/>
+              </a:rPr>
+              <a:t>▪  </a:t>
+            </a:r>
+            <a:r>
+              <a:rPr sz="1150" b="1" i="0">
+                <a:solidFill>
+                  <a:srgbClr val="0B0B0B"/>
+                </a:solidFill>
+                <a:latin typeface="Segoe UI"/>
+              </a:rPr>
+              <a:t>Headroom. </a:t>
+            </a:r>
+            <a:r>
+              <a:rPr sz="1150" b="0" i="0">
+                <a:solidFill>
+                  <a:srgbClr val="52514E"/>
+                </a:solidFill>
+                <a:latin typeface="Segoe UI"/>
+              </a:rPr>
+              <a:t>+8.2% demand before no timing can cope — about 1.6 years at 5% annual growth. After that the fix is road space.</a:t>
             </a:r>
           </a:p>
         </p:txBody>
@@ -12874,7 +12908,7 @@
                 </a:solidFill>
                 <a:latin typeface="Segoe UI"/>
               </a:rPr>
-              <a:t>Continuous RTSP ingest. </a:t>
+              <a:t>A live camera feed. </a:t>
             </a:r>
             <a:r>
               <a:rPr sz="1150" b="0" i="0">
@@ -12883,7 +12917,7 @@
                 </a:solidFill>
                 <a:latin typeface="Segoe UI"/>
               </a:rPr>
-              <a:t>Replaces 31 minutes of clips with a live feed; the pipeline is already windowed for it.</a:t>
+              <a:t>The live monitor already runs the full pipeline in real time on the clips; an RTSP reader is the remaining piece.</a:t>
             </a:r>
           </a:p>
         </p:txBody>
@@ -13038,7 +13072,7 @@
                 </a:solidFill>
                 <a:latin typeface="Segoe UI"/>
               </a:rPr>
-              <a:t>Production stack. </a:t>
+              <a:t>City scale. </a:t>
             </a:r>
             <a:r>
               <a:rPr sz="1150" b="0" i="0">
@@ -13047,7 +13081,7 @@
                 </a:solidFill>
                 <a:latin typeface="Segoe UI"/>
               </a:rPr>
-              <a:t>React + Kafka + PostGIS for city-scale deployment; the measurement core is unchanged.</a:t>
+              <a:t>A message bus and a spatial database for hundreds of cameras; the measurement core and React control room are unchanged.</a:t>
             </a:r>
           </a:p>
         </p:txBody>
@@ -19902,7 +19936,7 @@
                 </a:solidFill>
                 <a:latin typeface="Segoe UI"/>
               </a:rPr>
-              <a:t>Thirteen views across two tracks that never mix</a:t>
+              <a:t>A live control room, and fifteen views across two tracks</a:t>
             </a:r>
           </a:p>
         </p:txBody>
@@ -19941,7 +19975,7 @@
                 </a:solidFill>
                 <a:latin typeface="Segoe UI"/>
               </a:rPr>
-              <a:t>Selecting a control strategy changes which views exist — neither track can render the other's data.</a:t>
+              <a:t>Every camera on one screen — replayed, or detected in real time — with alerts the moment their evidence completes.</a:t>
             </a:r>
           </a:p>
         </p:txBody>
@@ -19992,7 +20026,7 @@
       </p:sp>
       <p:pic>
         <p:nvPicPr>
-          <p:cNvPr id="6" name="Picture 5" descr="webster-network.png"/>
+          <p:cNvPr id="6" name="Picture 5" descr="live-detection.png"/>
           <p:cNvPicPr>
             <a:picLocks noChangeAspect="1"/>
           </p:cNvPicPr>
@@ -20007,7 +20041,7 @@
         <p:spPr>
           <a:xfrm>
             <a:off x="658368" y="1938528"/>
-            <a:ext cx="6172200" cy="4225018"/>
+            <a:ext cx="6172200" cy="3318559"/>
           </a:xfrm>
           <a:prstGeom prst="rect">
             <a:avLst/>
@@ -20023,7 +20057,7 @@
         <p:spPr>
           <a:xfrm>
             <a:off x="658368" y="1938528"/>
-            <a:ext cx="6172200" cy="4225018"/>
+            <a:ext cx="6172200" cy="3318559"/>
           </a:xfrm>
           <a:prstGeom prst="rect">
             <a:avLst/>
@@ -20088,11 +20122,11 @@
             <a:r>
               <a:rPr sz="950" b="1" i="0">
                 <a:solidFill>
-                  <a:srgbClr val="2A78D6"/>
-                </a:solidFill>
-                <a:latin typeface="Segoe UI"/>
-              </a:rPr>
-              <a:t>TRACK 1 — WEBSTER'S · SURAT CCTV</a:t>
+                  <a:srgbClr val="D03B3B"/>
+                </a:solidFill>
+                <a:latin typeface="Segoe UI"/>
+              </a:rPr>
+              <a:t>LIVE CONTROL ROOM</a:t>
             </a:r>
           </a:p>
         </p:txBody>
@@ -20121,36 +20155,173 @@
           <a:p>
             <a:pPr algn="l">
               <a:spcAft>
-                <a:spcPts val="700"/>
-              </a:spcAft>
-            </a:pPr>
-            <a:r>
-              <a:rPr sz="1150" b="1" i="0">
+                <a:spcPts val="600"/>
+              </a:spcAft>
+            </a:pPr>
+            <a:r>
+              <a:rPr sz="1100" b="1" i="0">
+                <a:solidFill>
+                  <a:srgbClr val="D03B3B"/>
+                </a:solidFill>
+                <a:latin typeface="Segoe UI"/>
+              </a:rPr>
+              <a:t>▪  </a:t>
+            </a:r>
+            <a:r>
+              <a:rPr sz="1100" b="0" i="0">
+                <a:solidFill>
+                  <a:srgbClr val="52514E"/>
+                </a:solidFill>
+                <a:latin typeface="Segoe UI"/>
+              </a:rPr>
+              <a:t>Replay on one clock; alerts never quote the future</a:t>
+            </a:r>
+          </a:p>
+          <a:p>
+            <a:pPr>
+              <a:spcAft>
+                <a:spcPts val="600"/>
+              </a:spcAft>
+            </a:pPr>
+            <a:r>
+              <a:rPr sz="1100" b="1" i="0">
+                <a:solidFill>
+                  <a:srgbClr val="D03B3B"/>
+                </a:solidFill>
+                <a:latin typeface="Segoe UI"/>
+              </a:rPr>
+              <a:t>▪  </a:t>
+            </a:r>
+            <a:r>
+              <a:rPr sz="1100" b="0" i="0">
+                <a:solidFill>
+                  <a:srgbClr val="52514E"/>
+                </a:solidFill>
+                <a:latin typeface="Segoe UI"/>
+              </a:rPr>
+              <a:t>Real-time YOLO11 + ByteTrack — 25 fps on an Intel iGPU</a:t>
+            </a:r>
+          </a:p>
+          <a:p>
+            <a:pPr>
+              <a:spcAft>
+                <a:spcPts val="600"/>
+              </a:spcAft>
+            </a:pPr>
+            <a:r>
+              <a:rPr sz="1100" b="1" i="0">
+                <a:solidFill>
+                  <a:srgbClr val="D03B3B"/>
+                </a:solidFill>
+                <a:latin typeface="Segoe UI"/>
+              </a:rPr>
+              <a:t>▪  </a:t>
+            </a:r>
+            <a:r>
+              <a:rPr sz="1100" b="0" i="0">
+                <a:solidFill>
+                  <a:srgbClr val="52514E"/>
+                </a:solidFill>
+                <a:latin typeface="Segoe UI"/>
+              </a:rPr>
+              <a:t>Stalled-vehicle watch · incidents acknowledged, resolved, logged</a:t>
+            </a:r>
+          </a:p>
+        </p:txBody>
+      </p:sp>
+      <p:sp>
+        <p:nvSpPr>
+          <p:cNvPr id="10" name="TextBox 9"/>
+          <p:cNvSpPr txBox="1"/>
+          <p:nvPr/>
+        </p:nvSpPr>
+        <p:spPr>
+          <a:xfrm>
+            <a:off x="7516368" y="3401568"/>
+            <a:ext cx="4206240" cy="274320"/>
+          </a:xfrm>
+          <a:prstGeom prst="rect">
+            <a:avLst/>
+          </a:prstGeom>
+          <a:noFill/>
+        </p:spPr>
+        <p:txBody>
+          <a:bodyPr wrap="square" lIns="0" rIns="0" tIns="0" bIns="0" anchor="t">
+            <a:spAutoFit/>
+          </a:bodyPr>
+          <a:lstStyle/>
+          <a:p>
+            <a:pPr algn="l">
+              <a:spcAft>
+                <a:spcPts val="0"/>
+              </a:spcAft>
+            </a:pPr>
+            <a:r>
+              <a:rPr sz="950" b="1" i="0">
                 <a:solidFill>
                   <a:srgbClr val="2A78D6"/>
                 </a:solidFill>
                 <a:latin typeface="Segoe UI"/>
               </a:rPr>
+              <a:t>TRACK 1 — WEBSTER'S · SURAT CCTV</a:t>
+            </a:r>
+          </a:p>
+        </p:txBody>
+      </p:sp>
+      <p:sp>
+        <p:nvSpPr>
+          <p:cNvPr id="11" name="TextBox 10"/>
+          <p:cNvSpPr txBox="1"/>
+          <p:nvPr/>
+        </p:nvSpPr>
+        <p:spPr>
+          <a:xfrm>
+            <a:off x="7516368" y="3675888"/>
+            <a:ext cx="4206240" cy="365760"/>
+          </a:xfrm>
+          <a:prstGeom prst="rect">
+            <a:avLst/>
+          </a:prstGeom>
+          <a:noFill/>
+        </p:spPr>
+        <p:txBody>
+          <a:bodyPr wrap="square" lIns="0" rIns="0" tIns="0" bIns="0" anchor="t">
+            <a:spAutoFit/>
+          </a:bodyPr>
+          <a:lstStyle/>
+          <a:p>
+            <a:pPr algn="l">
+              <a:spcAft>
+                <a:spcPts val="600"/>
+              </a:spcAft>
+            </a:pPr>
+            <a:r>
+              <a:rPr sz="1100" b="1" i="0">
+                <a:solidFill>
+                  <a:srgbClr val="2A78D6"/>
+                </a:solidFill>
+                <a:latin typeface="Segoe UI"/>
+              </a:rPr>
               <a:t>▪  </a:t>
             </a:r>
             <a:r>
-              <a:rPr sz="1150" b="0" i="0">
+              <a:rPr sz="1100" b="0" i="0">
                 <a:solidFill>
                   <a:srgbClr val="52514E"/>
                 </a:solidFill>
                 <a:latin typeface="Segoe UI"/>
               </a:rPr>
-              <a:t>Network — LOS bands and congestion ranking</a:t>
+              <a:t>Network map · Site detail · Outlook</a:t>
             </a:r>
           </a:p>
           <a:p>
             <a:pPr>
               <a:spcAft>
-                <a:spcPts val="700"/>
-              </a:spcAft>
-            </a:pPr>
-            <a:r>
-              <a:rPr sz="1150" b="1" i="0">
+                <a:spcPts val="600"/>
+              </a:spcAft>
+            </a:pPr>
+            <a:r>
+              <a:rPr sz="1100" b="1" i="0">
                 <a:solidFill>
                   <a:srgbClr val="2A78D6"/>
                 </a:solidFill>
@@ -20159,23 +20330,23 @@
               <a:t>▪  </a:t>
             </a:r>
             <a:r>
-              <a:rPr sz="1150" b="0" i="0">
+              <a:rPr sz="1100" b="0" i="0">
                 <a:solidFill>
                   <a:srgbClr val="52514E"/>
                 </a:solidFill>
                 <a:latin typeface="Segoe UI"/>
               </a:rPr>
-              <a:t>Site detail — zones, overlay, heatmap, trends</a:t>
+              <a:t>Signal timing with headroom and what-if</a:t>
             </a:r>
           </a:p>
           <a:p>
             <a:pPr>
               <a:spcAft>
-                <a:spcPts val="700"/>
-              </a:spcAft>
-            </a:pPr>
-            <a:r>
-              <a:rPr sz="1150" b="1" i="0">
+                <a:spcPts val="600"/>
+              </a:spcAft>
+            </a:pPr>
+            <a:r>
+              <a:rPr sz="1100" b="1" i="0">
                 <a:solidFill>
                   <a:srgbClr val="2A78D6"/>
                 </a:solidFill>
@@ -20184,23 +20355,23 @@
               <a:t>▪  </a:t>
             </a:r>
             <a:r>
-              <a:rPr sz="1150" b="0" i="0">
+              <a:rPr sz="1100" b="0" i="0">
                 <a:solidFill>
                   <a:srgbClr val="52514E"/>
                 </a:solidFill>
                 <a:latin typeface="Segoe UI"/>
               </a:rPr>
-              <a:t>Signal timing — cycle, splits, delay, saturation</a:t>
+              <a:t>Bottlenecks with evidence · printable briefing</a:t>
             </a:r>
           </a:p>
           <a:p>
             <a:pPr>
               <a:spcAft>
-                <a:spcPts val="700"/>
-              </a:spcAft>
-            </a:pPr>
-            <a:r>
-              <a:rPr sz="1150" b="1" i="0">
+                <a:spcPts val="600"/>
+              </a:spcAft>
+            </a:pPr>
+            <a:r>
+              <a:rPr sz="1100" b="1" i="0">
                 <a:solidFill>
                   <a:srgbClr val="2A78D6"/>
                 </a:solidFill>
@@ -20209,257 +20380,132 @@
               <a:t>▪  </a:t>
             </a:r>
             <a:r>
-              <a:rPr sz="1150" b="0" i="0">
+              <a:rPr sz="1100" b="0" i="0">
                 <a:solidFill>
                   <a:srgbClr val="52514E"/>
                 </a:solidFill>
                 <a:latin typeface="Segoe UI"/>
               </a:rPr>
-              <a:t>Bottlenecks — every alert with its evidence</a:t>
+              <a:t>Analyse footage · Calibration · How it works</a:t>
+            </a:r>
+          </a:p>
+        </p:txBody>
+      </p:sp>
+      <p:sp>
+        <p:nvSpPr>
+          <p:cNvPr id="12" name="TextBox 11"/>
+          <p:cNvSpPr txBox="1"/>
+          <p:nvPr/>
+        </p:nvSpPr>
+        <p:spPr>
+          <a:xfrm>
+            <a:off x="7516368" y="5093208"/>
+            <a:ext cx="4206240" cy="274320"/>
+          </a:xfrm>
+          <a:prstGeom prst="rect">
+            <a:avLst/>
+          </a:prstGeom>
+          <a:noFill/>
+        </p:spPr>
+        <p:txBody>
+          <a:bodyPr wrap="square" lIns="0" rIns="0" tIns="0" bIns="0" anchor="t">
+            <a:spAutoFit/>
+          </a:bodyPr>
+          <a:lstStyle/>
+          <a:p>
+            <a:pPr algn="l">
+              <a:spcAft>
+                <a:spcPts val="0"/>
+              </a:spcAft>
+            </a:pPr>
+            <a:r>
+              <a:rPr sz="950" b="1" i="0">
+                <a:solidFill>
+                  <a:srgbClr val="EB6834"/>
+                </a:solidFill>
+                <a:latin typeface="Segoe UI"/>
+              </a:rPr>
+              <a:t>TRACK 2 — MAX-PRESSURE · FLUID DRONE</a:t>
+            </a:r>
+          </a:p>
+        </p:txBody>
+      </p:sp>
+      <p:sp>
+        <p:nvSpPr>
+          <p:cNvPr id="13" name="TextBox 12"/>
+          <p:cNvSpPr txBox="1"/>
+          <p:nvPr/>
+        </p:nvSpPr>
+        <p:spPr>
+          <a:xfrm>
+            <a:off x="7516368" y="5367528"/>
+            <a:ext cx="4206240" cy="365760"/>
+          </a:xfrm>
+          <a:prstGeom prst="rect">
+            <a:avLst/>
+          </a:prstGeom>
+          <a:noFill/>
+        </p:spPr>
+        <p:txBody>
+          <a:bodyPr wrap="square" lIns="0" rIns="0" tIns="0" bIns="0" anchor="t">
+            <a:spAutoFit/>
+          </a:bodyPr>
+          <a:lstStyle/>
+          <a:p>
+            <a:pPr algn="l">
+              <a:spcAft>
+                <a:spcPts val="600"/>
+              </a:spcAft>
+            </a:pPr>
+            <a:r>
+              <a:rPr sz="1100" b="1" i="0">
+                <a:solidFill>
+                  <a:srgbClr val="EB6834"/>
+                </a:solidFill>
+                <a:latin typeface="Segoe UI"/>
+              </a:rPr>
+              <a:t>▪  </a:t>
+            </a:r>
+            <a:r>
+              <a:rPr sz="1100" b="0" i="0">
+                <a:solidFill>
+                  <a:srgbClr val="52514E"/>
+                </a:solidFill>
+                <a:latin typeface="Segoe UI"/>
+              </a:rPr>
+              <a:t>Validation against 3 real signals · Scene</a:t>
             </a:r>
           </a:p>
           <a:p>
             <a:pPr>
               <a:spcAft>
-                <a:spcPts val="700"/>
-              </a:spcAft>
-            </a:pPr>
-            <a:r>
-              <a:rPr sz="1150" b="1" i="0">
-                <a:solidFill>
-                  <a:srgbClr val="2A78D6"/>
+                <a:spcPts val="600"/>
+              </a:spcAft>
+            </a:pPr>
+            <a:r>
+              <a:rPr sz="1100" b="1" i="0">
+                <a:solidFill>
+                  <a:srgbClr val="EB6834"/>
                 </a:solidFill>
                 <a:latin typeface="Segoe UI"/>
               </a:rPr>
               <a:t>▪  </a:t>
             </a:r>
             <a:r>
-              <a:rPr sz="1150" b="0" i="0">
+              <a:rPr sz="1100" b="0" i="0">
                 <a:solidFill>
                   <a:srgbClr val="52514E"/>
                 </a:solidFill>
                 <a:latin typeface="Segoe UI"/>
               </a:rPr>
-              <a:t>Outlook — forecasts with prediction bands</a:t>
-            </a:r>
-          </a:p>
-          <a:p>
-            <a:pPr>
-              <a:spcAft>
-                <a:spcPts val="700"/>
-              </a:spcAft>
-            </a:pPr>
-            <a:r>
-              <a:rPr sz="1150" b="1" i="0">
-                <a:solidFill>
-                  <a:srgbClr val="2A78D6"/>
-                </a:solidFill>
-                <a:latin typeface="Segoe UI"/>
-              </a:rPr>
-              <a:t>▪  </a:t>
-            </a:r>
-            <a:r>
-              <a:rPr sz="1150" b="0" i="0">
-                <a:solidFill>
-                  <a:srgbClr val="52514E"/>
-                </a:solidFill>
-                <a:latin typeface="Segoe UI"/>
-              </a:rPr>
-              <a:t>Analyse footage · Calibration · How it works</a:t>
-            </a:r>
-          </a:p>
-        </p:txBody>
-      </p:sp>
-      <p:sp>
-        <p:nvSpPr>
-          <p:cNvPr id="10" name="TextBox 9"/>
-          <p:cNvSpPr txBox="1"/>
-          <p:nvPr/>
-        </p:nvSpPr>
-        <p:spPr>
-          <a:xfrm>
-            <a:off x="7516368" y="4361688"/>
-            <a:ext cx="4206240" cy="274320"/>
-          </a:xfrm>
-          <a:prstGeom prst="rect">
-            <a:avLst/>
-          </a:prstGeom>
-          <a:noFill/>
-        </p:spPr>
-        <p:txBody>
-          <a:bodyPr wrap="square" lIns="0" rIns="0" tIns="0" bIns="0" anchor="t">
-            <a:spAutoFit/>
-          </a:bodyPr>
-          <a:lstStyle/>
-          <a:p>
-            <a:pPr algn="l">
-              <a:spcAft>
-                <a:spcPts val="0"/>
-              </a:spcAft>
-            </a:pPr>
-            <a:r>
-              <a:rPr sz="950" b="1" i="0">
-                <a:solidFill>
-                  <a:srgbClr val="EB6834"/>
-                </a:solidFill>
-                <a:latin typeface="Segoe UI"/>
-              </a:rPr>
-              <a:t>TRACK 2 — MAX-PRESSURE · FLUID DRONE</a:t>
-            </a:r>
-          </a:p>
-        </p:txBody>
-      </p:sp>
-      <p:sp>
-        <p:nvSpPr>
-          <p:cNvPr id="11" name="TextBox 10"/>
-          <p:cNvSpPr txBox="1"/>
-          <p:nvPr/>
-        </p:nvSpPr>
-        <p:spPr>
-          <a:xfrm>
-            <a:off x="7516368" y="4636008"/>
-            <a:ext cx="4206240" cy="365760"/>
-          </a:xfrm>
-          <a:prstGeom prst="rect">
-            <a:avLst/>
-          </a:prstGeom>
-          <a:noFill/>
-        </p:spPr>
-        <p:txBody>
-          <a:bodyPr wrap="square" lIns="0" rIns="0" tIns="0" bIns="0" anchor="t">
-            <a:spAutoFit/>
-          </a:bodyPr>
-          <a:lstStyle/>
-          <a:p>
-            <a:pPr algn="l">
-              <a:spcAft>
-                <a:spcPts val="700"/>
-              </a:spcAft>
-            </a:pPr>
-            <a:r>
-              <a:rPr sz="1150" b="1" i="0">
-                <a:solidFill>
-                  <a:srgbClr val="EB6834"/>
-                </a:solidFill>
-                <a:latin typeface="Segoe UI"/>
-              </a:rPr>
-              <a:t>▪  </a:t>
-            </a:r>
-            <a:r>
-              <a:rPr sz="1150" b="0" i="0">
-                <a:solidFill>
-                  <a:srgbClr val="52514E"/>
-                </a:solidFill>
-                <a:latin typeface="Segoe UI"/>
-              </a:rPr>
-              <a:t>Validation — replayed against 3 real signals</a:t>
-            </a:r>
-          </a:p>
-          <a:p>
-            <a:pPr>
-              <a:spcAft>
-                <a:spcPts val="700"/>
-              </a:spcAft>
-            </a:pPr>
-            <a:r>
-              <a:rPr sz="1150" b="1" i="0">
-                <a:solidFill>
-                  <a:srgbClr val="EB6834"/>
-                </a:solidFill>
-                <a:latin typeface="Segoe UI"/>
-              </a:rPr>
-              <a:t>▪  </a:t>
-            </a:r>
-            <a:r>
-              <a:rPr sz="1150" b="0" i="0">
-                <a:solidFill>
-                  <a:srgbClr val="52514E"/>
-                </a:solidFill>
-                <a:latin typeface="Segoe UI"/>
-              </a:rPr>
-              <a:t>Scene — aerial with live queue shading</a:t>
-            </a:r>
-          </a:p>
-          <a:p>
-            <a:pPr>
-              <a:spcAft>
-                <a:spcPts val="700"/>
-              </a:spcAft>
-            </a:pPr>
-            <a:r>
-              <a:rPr sz="1150" b="1" i="0">
-                <a:solidFill>
-                  <a:srgbClr val="EB6834"/>
-                </a:solidFill>
-                <a:latin typeface="Segoe UI"/>
-              </a:rPr>
-              <a:t>▪  </a:t>
-            </a:r>
-            <a:r>
-              <a:rPr sz="1150" b="0" i="0">
-                <a:solidFill>
-                  <a:srgbClr val="52514E"/>
-                </a:solidFill>
-                <a:latin typeface="Segoe UI"/>
-              </a:rPr>
-              <a:t>Phase pressure — every movement's terms</a:t>
-            </a:r>
-          </a:p>
-          <a:p>
-            <a:pPr>
-              <a:spcAft>
-                <a:spcPts val="700"/>
-              </a:spcAft>
-            </a:pPr>
-            <a:r>
-              <a:rPr sz="1150" b="1" i="0">
-                <a:solidFill>
-                  <a:srgbClr val="EB6834"/>
-                </a:solidFill>
-                <a:latin typeface="Segoe UI"/>
-              </a:rPr>
-              <a:t>▪  </a:t>
-            </a:r>
-            <a:r>
-              <a:rPr sz="1150" b="0" i="0">
-                <a:solidFill>
-                  <a:srgbClr val="52514E"/>
-                </a:solidFill>
-                <a:latin typeface="Segoe UI"/>
-              </a:rPr>
-              <a:t>Head-to-head — 3 demand regimes simulated</a:t>
-            </a:r>
-          </a:p>
-          <a:p>
-            <a:pPr>
-              <a:spcAft>
-                <a:spcPts val="700"/>
-              </a:spcAft>
-            </a:pPr>
-            <a:r>
-              <a:rPr sz="1150" b="1" i="0">
-                <a:solidFill>
-                  <a:srgbClr val="EB6834"/>
-                </a:solidFill>
-                <a:latin typeface="Segoe UI"/>
-              </a:rPr>
-              <a:t>▪  </a:t>
-            </a:r>
-            <a:r>
-              <a:rPr sz="1150" b="0" i="0">
-                <a:solidFill>
-                  <a:srgbClr val="52514E"/>
-                </a:solidFill>
-                <a:latin typeface="Segoe UI"/>
-              </a:rPr>
-              <a:t>Method — what the data can and cannot say</a:t>
-            </a:r>
-          </a:p>
-        </p:txBody>
-      </p:sp>
-      <p:sp>
-        <p:nvSpPr>
-          <p:cNvPr id="12" name="TextBox 11"/>
+              <a:t>Phase pressure · Head-to-head · Method</a:t>
+            </a:r>
+          </a:p>
+        </p:txBody>
+      </p:sp>
+      <p:sp>
+        <p:nvSpPr>
+          <p:cNvPr id="14" name="TextBox 13"/>
           <p:cNvSpPr txBox="1"/>
           <p:nvPr/>
         </p:nvSpPr>
@@ -20507,7 +20553,7 @@
       </p:sp>
       <p:sp>
         <p:nvSpPr>
-          <p:cNvPr id="13" name="TextBox 12"/>
+          <p:cNvPr id="15" name="TextBox 14"/>
           <p:cNvSpPr txBox="1"/>
           <p:nvPr/>
         </p:nvSpPr>
@@ -22258,7 +22304,7 @@
                 </a:solidFill>
                 <a:latin typeface="Segoe UI"/>
               </a:rPr>
-              <a:t>Streamlit + Plotly</a:t>
+              <a:t>React 19 + FastAPI</a:t>
             </a:r>
           </a:p>
         </p:txBody>
@@ -22297,7 +22343,7 @@
                 </a:solidFill>
                 <a:latin typeface="Segoe UI"/>
               </a:rPr>
-              <a:t>Operator view without a JS build step</a:t>
+              <a:t>Live SSE + MJPEG streams; one Python process serves it</a:t>
             </a:r>
           </a:p>
         </p:txBody>
@@ -22550,7 +22596,7 @@
                 </a:solidFill>
                 <a:latin typeface="Segoe UI"/>
               </a:rPr>
-              <a:t>NVIDIA RTX 3050 6 GB laptop GPU. No cloud training was needed — the UVH-26 weights removed the training step entirely.</a:t>
+              <a:t>NVIDIA RTX 3050 6 GB laptop GPU for the batch pipeline; live detection also runs on a plain Intel laptop — OpenVINO on its integrated GPU at 25 fps (6 fps PyTorch CPU). No cloud training was needed: the UVH-26 weights removed the training step entirely.</a:t>
             </a:r>
           </a:p>
         </p:txBody>
